--- a/qemt_designs.pptx
+++ b/qemt_designs.pptx
@@ -104,6 +104,11 @@
       </a:defRPr>
     </a:lvl9pPr>
   </p:defaultTextStyle>
+  <p:extLst>
+    <p:ext uri="{EFAFB233-063F-42B5-8137-9DF3F51BA10A}">
+      <p15:sldGuideLst xmlns:p15="http://schemas.microsoft.com/office/powerpoint/2012/main"/>
+    </p:ext>
+  </p:extLst>
 </p:presentation>
 </file>
 
@@ -256,7 +261,7 @@
           <a:p>
             <a:fld id="{3E8BABDF-2FE6-40F3-ADA0-71A692FDE915}" type="datetimeFigureOut">
               <a:rPr lang="en-GB" smtClean="0"/>
-              <a:t>27/04/2026</a:t>
+              <a:t>29/04/2026</a:t>
             </a:fld>
             <a:endParaRPr lang="en-GB"/>
           </a:p>
@@ -456,7 +461,7 @@
           <a:p>
             <a:fld id="{3E8BABDF-2FE6-40F3-ADA0-71A692FDE915}" type="datetimeFigureOut">
               <a:rPr lang="en-GB" smtClean="0"/>
-              <a:t>27/04/2026</a:t>
+              <a:t>29/04/2026</a:t>
             </a:fld>
             <a:endParaRPr lang="en-GB"/>
           </a:p>
@@ -666,7 +671,7 @@
           <a:p>
             <a:fld id="{3E8BABDF-2FE6-40F3-ADA0-71A692FDE915}" type="datetimeFigureOut">
               <a:rPr lang="en-GB" smtClean="0"/>
-              <a:t>27/04/2026</a:t>
+              <a:t>29/04/2026</a:t>
             </a:fld>
             <a:endParaRPr lang="en-GB"/>
           </a:p>
@@ -866,7 +871,7 @@
           <a:p>
             <a:fld id="{3E8BABDF-2FE6-40F3-ADA0-71A692FDE915}" type="datetimeFigureOut">
               <a:rPr lang="en-GB" smtClean="0"/>
-              <a:t>27/04/2026</a:t>
+              <a:t>29/04/2026</a:t>
             </a:fld>
             <a:endParaRPr lang="en-GB"/>
           </a:p>
@@ -1142,7 +1147,7 @@
           <a:p>
             <a:fld id="{3E8BABDF-2FE6-40F3-ADA0-71A692FDE915}" type="datetimeFigureOut">
               <a:rPr lang="en-GB" smtClean="0"/>
-              <a:t>27/04/2026</a:t>
+              <a:t>29/04/2026</a:t>
             </a:fld>
             <a:endParaRPr lang="en-GB"/>
           </a:p>
@@ -1410,7 +1415,7 @@
           <a:p>
             <a:fld id="{3E8BABDF-2FE6-40F3-ADA0-71A692FDE915}" type="datetimeFigureOut">
               <a:rPr lang="en-GB" smtClean="0"/>
-              <a:t>27/04/2026</a:t>
+              <a:t>29/04/2026</a:t>
             </a:fld>
             <a:endParaRPr lang="en-GB"/>
           </a:p>
@@ -1825,7 +1830,7 @@
           <a:p>
             <a:fld id="{3E8BABDF-2FE6-40F3-ADA0-71A692FDE915}" type="datetimeFigureOut">
               <a:rPr lang="en-GB" smtClean="0"/>
-              <a:t>27/04/2026</a:t>
+              <a:t>29/04/2026</a:t>
             </a:fld>
             <a:endParaRPr lang="en-GB"/>
           </a:p>
@@ -1967,7 +1972,7 @@
           <a:p>
             <a:fld id="{3E8BABDF-2FE6-40F3-ADA0-71A692FDE915}" type="datetimeFigureOut">
               <a:rPr lang="en-GB" smtClean="0"/>
-              <a:t>27/04/2026</a:t>
+              <a:t>29/04/2026</a:t>
             </a:fld>
             <a:endParaRPr lang="en-GB"/>
           </a:p>
@@ -2080,7 +2085,7 @@
           <a:p>
             <a:fld id="{3E8BABDF-2FE6-40F3-ADA0-71A692FDE915}" type="datetimeFigureOut">
               <a:rPr lang="en-GB" smtClean="0"/>
-              <a:t>27/04/2026</a:t>
+              <a:t>29/04/2026</a:t>
             </a:fld>
             <a:endParaRPr lang="en-GB"/>
           </a:p>
@@ -2393,7 +2398,7 @@
           <a:p>
             <a:fld id="{3E8BABDF-2FE6-40F3-ADA0-71A692FDE915}" type="datetimeFigureOut">
               <a:rPr lang="en-GB" smtClean="0"/>
-              <a:t>27/04/2026</a:t>
+              <a:t>29/04/2026</a:t>
             </a:fld>
             <a:endParaRPr lang="en-GB"/>
           </a:p>
@@ -2682,7 +2687,7 @@
           <a:p>
             <a:fld id="{3E8BABDF-2FE6-40F3-ADA0-71A692FDE915}" type="datetimeFigureOut">
               <a:rPr lang="en-GB" smtClean="0"/>
-              <a:t>27/04/2026</a:t>
+              <a:t>29/04/2026</a:t>
             </a:fld>
             <a:endParaRPr lang="en-GB"/>
           </a:p>
@@ -2925,7 +2930,7 @@
           <a:p>
             <a:fld id="{3E8BABDF-2FE6-40F3-ADA0-71A692FDE915}" type="datetimeFigureOut">
               <a:rPr lang="en-GB" smtClean="0"/>
-              <a:t>27/04/2026</a:t>
+              <a:t>29/04/2026</a:t>
             </a:fld>
             <a:endParaRPr lang="en-GB"/>
           </a:p>
@@ -3656,10 +3661,10 @@
         </p:nvGrpSpPr>
         <p:grpSpPr>
           <a:xfrm>
-            <a:off x="245674" y="453840"/>
-            <a:ext cx="5684620" cy="2952436"/>
+            <a:off x="292296" y="607500"/>
+            <a:ext cx="5684620" cy="1542740"/>
             <a:chOff x="215389" y="820092"/>
-            <a:chExt cx="5684620" cy="2952436"/>
+            <a:chExt cx="5684620" cy="1542740"/>
           </a:xfrm>
         </p:grpSpPr>
         <p:grpSp>
@@ -3677,9 +3682,9 @@
           <p:grpSpPr>
             <a:xfrm>
               <a:off x="1121748" y="820092"/>
-              <a:ext cx="2898710" cy="2898710"/>
+              <a:ext cx="2898710" cy="1542740"/>
               <a:chOff x="93410" y="206479"/>
-              <a:chExt cx="2898710" cy="2898710"/>
+              <a:chExt cx="2898710" cy="1542740"/>
             </a:xfrm>
           </p:grpSpPr>
           <p:sp>
@@ -3697,7 +3702,7 @@
             <p:spPr>
               <a:xfrm>
                 <a:off x="93410" y="206479"/>
-                <a:ext cx="2898710" cy="2898710"/>
+                <a:ext cx="2898710" cy="1542740"/>
               </a:xfrm>
               <a:prstGeom prst="roundRect">
                 <a:avLst>
@@ -5631,7 +5636,7 @@
           <p:spPr>
             <a:xfrm>
               <a:off x="215389" y="910206"/>
-              <a:ext cx="934634" cy="2862322"/>
+              <a:ext cx="934634" cy="1015663"/>
             </a:xfrm>
             <a:prstGeom prst="rect">
               <a:avLst/>
@@ -5658,43 +5663,7 @@
             <a:p>
               <a:r>
                 <a:rPr lang="en-GB" sz="2000" dirty="0"/>
-                <a:t>Row 3</a:t>
-              </a:r>
-            </a:p>
-            <a:p>
-              <a:r>
-                <a:rPr lang="en-GB" sz="2000" dirty="0"/>
-                <a:t>Row 4</a:t>
-              </a:r>
-            </a:p>
-            <a:p>
-              <a:r>
-                <a:rPr lang="en-GB" sz="2000" dirty="0"/>
-                <a:t>Row 5</a:t>
-              </a:r>
-            </a:p>
-            <a:p>
-              <a:r>
-                <a:rPr lang="en-GB" sz="2000" dirty="0"/>
-                <a:t>Row 6</a:t>
-              </a:r>
-            </a:p>
-            <a:p>
-              <a:r>
-                <a:rPr lang="en-GB" sz="2000" dirty="0"/>
-                <a:t>Row 7</a:t>
-              </a:r>
-            </a:p>
-            <a:p>
-              <a:r>
-                <a:rPr lang="en-GB" sz="2000" dirty="0"/>
-                <a:t>Row 8</a:t>
-              </a:r>
-            </a:p>
-            <a:p>
-              <a:r>
-                <a:rPr lang="en-GB" sz="2000" dirty="0"/>
-                <a:t>Row 9</a:t>
+                <a:t>…</a:t>
               </a:r>
             </a:p>
           </p:txBody>
